--- a/e2e/fixtures/field-substitution.pptx
+++ b/e2e/fixtures/field-substitution.pptx
@@ -365,7 +365,7 @@
           <a:spcPct val="20000"/>
         </a:spcBef>
         <a:buFont typeface="Arial" panose="020B0604020202020204" pitchFamily="34" charset="0"/>
-        <a:buChar char="&amp;#x2022;"/>
+        <a:buChar char="•"/>
         <a:defRPr sz="3200" kern="1200">
           <a:solidFill>
             <a:schemeClr val="tx1"/>
